--- a/word-drafts/figures/WoTCon-Fig2-ProjectionLifecycle.pptx
+++ b/word-drafts/figures/WoTCon-Fig2-ProjectionLifecycle.pptx
@@ -3597,7 +3597,7 @@
         <p:spPr>
           <a:xfrm>
             <a:off x="2667000" y="2314575"/>
-            <a:ext cx="1028700" cy="123825"/>
+            <a:ext cx="1295400" cy="123825"/>
           </a:xfrm>
           <a:prstGeom prst="rect">
             <a:avLst/>
@@ -3668,7 +3668,7 @@
         <p:spPr>
           <a:xfrm>
             <a:off x="2024062" y="3400425"/>
-            <a:ext cx="1343025" cy="123825"/>
+            <a:ext cx="1733550" cy="123825"/>
           </a:xfrm>
           <a:prstGeom prst="rect">
             <a:avLst/>
@@ -3738,8 +3738,8 @@
         </p:nvSpPr>
         <p:spPr>
           <a:xfrm>
-            <a:off x="3309937" y="3400425"/>
-            <a:ext cx="1000125" cy="123825"/>
+            <a:off x="3309937" y="3543300"/>
+            <a:ext cx="1219200" cy="123825"/>
           </a:xfrm>
           <a:prstGeom prst="rect">
             <a:avLst/>
@@ -3810,7 +3810,7 @@
         <p:spPr>
           <a:xfrm>
             <a:off x="2024062" y="4486275"/>
-            <a:ext cx="1095375" cy="123825"/>
+            <a:ext cx="1419225" cy="123825"/>
           </a:xfrm>
           <a:prstGeom prst="rect">
             <a:avLst/>
@@ -3881,7 +3881,7 @@
         <p:spPr>
           <a:xfrm>
             <a:off x="2667000" y="5572125"/>
-            <a:ext cx="742950" cy="123825"/>
+            <a:ext cx="952500" cy="123825"/>
           </a:xfrm>
           <a:prstGeom prst="rect">
             <a:avLst/>
@@ -3952,7 +3952,7 @@
         <p:spPr>
           <a:xfrm>
             <a:off x="2667000" y="6543675"/>
-            <a:ext cx="1619250" cy="123825"/>
+            <a:ext cx="2057400" cy="123825"/>
           </a:xfrm>
           <a:prstGeom prst="rect">
             <a:avLst/>
@@ -4023,7 +4023,7 @@
         <p:spPr>
           <a:xfrm>
             <a:off x="2667000" y="6800850"/>
-            <a:ext cx="1390650" cy="123825"/>
+            <a:ext cx="1752600" cy="123825"/>
           </a:xfrm>
           <a:prstGeom prst="rect">
             <a:avLst/>
@@ -4093,8 +4093,8 @@
         </p:nvSpPr>
         <p:spPr>
           <a:xfrm>
-            <a:off x="3309937" y="3543300"/>
-            <a:ext cx="1133475" cy="123825"/>
+            <a:off x="3309937" y="4686300"/>
+            <a:ext cx="1428750" cy="123825"/>
           </a:xfrm>
           <a:prstGeom prst="rect">
             <a:avLst/>
